--- a/巴塞罗那充电安全_方法建模协议科普PPT.pptx
+++ b/巴塞罗那充电安全_方法建模协议科普PPT.pptx
@@ -2755,8 +2755,8 @@
         </p:nvSpPr>
         <p:spPr>
           <a:xfrm>
-            <a:off x="640080" y="1508760"/>
-            <a:ext cx="5532120" cy="3291840"/>
+            <a:off x="640080" y="1463040"/>
+            <a:ext cx="5532120" cy="3474720"/>
           </a:xfrm>
           <a:prstGeom prst="rect">
             <a:avLst/>
@@ -2776,7 +2776,7 @@
               <a:buChar char="•"/>
             </a:pPr>
             <a:r>
-              <a:rPr lang="en-US" sz="1350" dirty="0">
+              <a:rPr lang="en-US" sz="1300" dirty="0">
                 <a:solidFill>
                   <a:srgbClr val="1A2633"/>
                 </a:solidFill>
@@ -2786,7 +2786,7 @@
               </a:rPr>
               <a:t>问题：隔离太晚 → 损失累积；误隔离健康后台 → 中断合法充电。</a:t>
             </a:r>
-            <a:endParaRPr lang="en-US" sz="1350" dirty="0"/>
+            <a:endParaRPr lang="en-US" sz="1300" dirty="0"/>
           </a:p>
           <a:p>
             <a:pPr algn="l" marL="342900" indent="-342900">
@@ -2797,7 +2797,7 @@
               <a:buChar char="•"/>
             </a:pPr>
             <a:r>
-              <a:rPr lang="en-US" sz="1350" dirty="0">
+              <a:rPr lang="en-US" sz="1300" dirty="0">
                 <a:solidFill>
                   <a:srgbClr val="1A2633"/>
                 </a:solidFill>
@@ -2807,7 +2807,7 @@
               </a:rPr>
               <a:t>建成贝叶斯快速变点检测：良性 r~N(1,σ₀)、攻击 r~N(1−δ,σ₀)，σ₀=0.39 取自真实数据。</a:t>
             </a:r>
-            <a:endParaRPr lang="en-US" sz="1350" dirty="0"/>
+            <a:endParaRPr lang="en-US" sz="1300" dirty="0"/>
           </a:p>
           <a:p>
             <a:pPr algn="l" marL="342900" indent="-342900">
@@ -2818,7 +2818,7 @@
               <a:buChar char="•"/>
             </a:pPr>
             <a:r>
-              <a:rPr lang="en-US" sz="1350" dirty="0">
+              <a:rPr lang="en-US" sz="1300" dirty="0">
                 <a:solidFill>
                   <a:srgbClr val="1A2633"/>
                 </a:solidFill>
@@ -2828,7 +2828,28 @@
               </a:rPr>
               <a:t>最优规则 = 对后验 pₜ=P(已被攻击) 的阈值 A*（Shiryaev）；A* 最小化 期望损失 c·时延 + K·误隔离。</a:t>
             </a:r>
-            <a:endParaRPr lang="en-US" sz="1350" dirty="0"/>
+            <a:endParaRPr lang="en-US" sz="1300" dirty="0"/>
+          </a:p>
+          <a:p>
+            <a:pPr algn="l" marL="342900" indent="-342900">
+              <a:spcAft>
+                <a:spcPts val="1000"/>
+              </a:spcAft>
+              <a:buSzPct val="100000"/>
+              <a:buChar char="•"/>
+            </a:pPr>
+            <a:r>
+              <a:rPr lang="en-US" sz="1300" dirty="0">
+                <a:solidFill>
+                  <a:srgbClr val="1A2633"/>
+                </a:solidFill>
+                <a:latin typeface="Calibri" pitchFamily="34" charset="0"/>
+                <a:ea typeface="Calibri" pitchFamily="34" charset="-122"/>
+                <a:cs typeface="Calibri" pitchFamily="34" charset="-120"/>
+              </a:rPr>
+              <a:t>六法对比：最优策略严格优于 CUSUM、学习型 ML（孤立森林/单类SVM）与固定规则。</a:t>
+            </a:r>
+            <a:endParaRPr lang="en-US" sz="1300" dirty="0"/>
           </a:p>
           <a:p>
             <a:pPr algn="l" marL="342900" indent="-342900">
@@ -2839,7 +2860,7 @@
               <a:buChar char="•"/>
             </a:pPr>
             <a:r>
-              <a:rPr lang="en-US" sz="1350" b="1" dirty="0">
+              <a:rPr lang="en-US" sz="1300" b="1" dirty="0">
                 <a:solidFill>
                   <a:srgbClr val="E8384F"/>
                 </a:solidFill>
@@ -2847,9 +2868,9 @@
                 <a:ea typeface="Calibri" pitchFamily="34" charset="-122"/>
                 <a:cs typeface="Calibri" pitchFamily="34" charset="-120"/>
               </a:rPr>
-              <a:t>发现：现用固定规则在真实噪声下误隔离 76%；最优策略把期望损失降 84%，越隐蔽优势越大。</a:t>
-            </a:r>
-            <a:endParaRPr lang="en-US" sz="1350" dirty="0"/>
+              <a:t>发现：真实噪声下固定规则误隔离 76%；最优策略降期望损失 84%，越隐蔽、误隔离代价越高优势越大。</a:t>
+            </a:r>
+            <a:endParaRPr lang="en-US" sz="1300" dirty="0"/>
           </a:p>
         </p:txBody>
       </p:sp>

--- a/巴塞罗那充电安全_方法建模协议科普PPT.pptx
+++ b/巴塞罗那充电安全_方法建模协议科普PPT.pptx
@@ -18,9 +18,10 @@
     <p:sldId id="266" r:id="rId12"/>
     <p:sldId id="267" r:id="rId13"/>
     <p:sldId id="268" r:id="rId14"/>
+    <p:sldId id="269" r:id="rId15"/>
   </p:sldIdLst>
   <p:notesMasterIdLst>
-    <p:notesMasterId r:id="rId15"/>
+    <p:notesMasterId r:id="rId16"/>
   </p:notesMasterIdLst>
   <p:sldSz cx="12191695" cy="6858000"/>
   <p:notesSz cx="6858000" cy="12191695"/>
@@ -690,7 +691,7 @@
           <a:p>
             <a:r>
               <a:rPr lang="en-US" dirty="0"/>
-              <a:t>实验设计：四维场景矩阵(攻击位置×协议版本×防御×范围)；主指标=被发现前损失+τ_d+误报率；可复现(固定种子、3次中位数、真实异常做闸门)。</a:t>
+              <a:t>算法×碎片化:把六法对比放回真实的8家运营商(规模3-138点)逐一标定。噪声随规模(小运营商更噪)、代价比随构成。贝叶斯最优是全体下包络(全队再降73%),且A*随运营商0.08→0.98自适应。固定规则只有一个阈值,在噪声大的小运营商失控。这回应'要用真实不同运营商对比算法',并保留碎片化视角。</a:t>
             </a:r>
             <a:endParaRPr lang="en-US" dirty="0"/>
           </a:p>
@@ -778,7 +779,7 @@
           <a:p>
             <a:r>
               <a:rPr lang="en-US" dirty="0"/>
-              <a:t>结果：单后台2.6-12.3MW→隔离后&lt;10kWh(&gt;99%)；协同5家11889→26.5kWh；电网0.16%。图是协同campaign累积曲线(红升绿平)。</a:t>
+              <a:t>实验设计：四维场景矩阵(攻击位置×协议版本×防御×范围)；主指标=被发现前损失+τ_d+误报率；可复现(固定种子、3次中位数、真实异常做闸门)。</a:t>
             </a:r>
             <a:endParaRPr lang="en-US" dirty="0"/>
           </a:p>
@@ -866,7 +867,7 @@
           <a:p>
             <a:r>
               <a:rPr lang="en-US" dirty="0"/>
-              <a:t>结论：方法可核查、建模够真、协议是关键、现实指导。一句话：电网不是主战场，网络层才是；碎片化+检测隔离让攻击几乎无损。</a:t>
+              <a:t>结果：单后台2.6-12.3MW→隔离后&lt;10kWh(&gt;99%)；协同5家11889→26.5kWh；电网0.16%。图是协同campaign累积曲线(红升绿平)。</a:t>
             </a:r>
             <a:endParaRPr lang="en-US" dirty="0"/>
           </a:p>
@@ -890,6 +891,94 @@
             <a:fld id="{F7021451-1387-4CA6-816F-3879F97B5CBC}" type="slidenum">
               <a:rPr lang="en-US"/>
               <a:t>13</a:t>
+            </a:fld>
+            <a:endParaRPr lang="en-US"/>
+          </a:p>
+        </p:txBody>
+      </p:sp>
+    </p:spTree>
+    <p:extLst>
+      <p:ext uri="{BB962C8B-B14F-4D97-AF65-F5344CB8AC3E}">
+        <p14:creationId xmlns:p14="http://schemas.microsoft.com/office/powerpoint/2010/main" val="1024086991"/>
+      </p:ext>
+    </p:extLst>
+  </p:cSld>
+  <p:clrMapOvr>
+    <a:masterClrMapping/>
+  </p:clrMapOvr>
+</p:notes>
+</file>
+
+<file path=ppt/notesSlides/notesSlide14.xml><?xml version="1.0" encoding="utf-8"?>
+<p:notes xmlns:a="http://schemas.openxmlformats.org/drawingml/2006/main" xmlns:r="http://schemas.openxmlformats.org/officeDocument/2006/relationships" xmlns:p="http://schemas.openxmlformats.org/presentationml/2006/main">
+  <p:cSld>
+    <p:spTree>
+      <p:nvGrpSpPr>
+        <p:cNvPr id="1" name=""/>
+        <p:cNvGrpSpPr/>
+        <p:nvPr/>
+      </p:nvGrpSpPr>
+      <p:grpSpPr>
+        <a:xfrm>
+          <a:off x="0" y="0"/>
+          <a:ext cx="0" cy="0"/>
+          <a:chOff x="0" y="0"/>
+          <a:chExt cx="0" cy="0"/>
+        </a:xfrm>
+      </p:grpSpPr>
+      <p:sp>
+        <p:nvSpPr>
+          <p:cNvPr id="2" name="Slide Image Placeholder 1"/>
+          <p:cNvSpPr>
+            <a:spLocks noGrp="1" noRot="1" noChangeAspect="1"/>
+          </p:cNvSpPr>
+          <p:nvPr>
+            <p:ph type="sldImg"/>
+          </p:nvPr>
+        </p:nvSpPr>
+        <p:spPr/>
+      </p:sp>
+      <p:sp>
+        <p:nvSpPr>
+          <p:cNvPr id="3" name="Notes Placeholder 2"/>
+          <p:cNvSpPr>
+            <a:spLocks noGrp="1"/>
+          </p:cNvSpPr>
+          <p:nvPr>
+            <p:ph type="body" idx="1"/>
+          </p:nvPr>
+        </p:nvSpPr>
+        <p:spPr/>
+        <p:txBody>
+          <a:bodyPr/>
+          <a:lstStyle/>
+          <a:p>
+            <a:r>
+              <a:rPr lang="en-US" dirty="0"/>
+              <a:t>结论：方法可核查、建模够真、协议是关键、现实指导。一句话：电网不是主战场，网络层才是；碎片化+检测隔离让攻击几乎无损。</a:t>
+            </a:r>
+            <a:endParaRPr lang="en-US" dirty="0"/>
+          </a:p>
+        </p:txBody>
+      </p:sp>
+      <p:sp>
+        <p:nvSpPr>
+          <p:cNvPr id="4" name="Slide Number Placeholder 3"/>
+          <p:cNvSpPr>
+            <a:spLocks noGrp="1"/>
+          </p:cNvSpPr>
+          <p:nvPr>
+            <p:ph type="sldNum" sz="quarter" idx="10"/>
+          </p:nvPr>
+        </p:nvSpPr>
+        <p:spPr/>
+        <p:txBody>
+          <a:bodyPr/>
+          <a:lstStyle/>
+          <a:p>
+            <a:fld id="{F7021451-1387-4CA6-816F-3879F97B5CBC}" type="slidenum">
+              <a:rPr lang="en-US"/>
+              <a:t>14</a:t>
             </a:fld>
             <a:endParaRPr lang="en-US"/>
           </a:p>
@@ -3286,13 +3375,13 @@
             <a:r>
               <a:rPr lang="en-US" sz="1200" b="1" spc="200" kern="0" dirty="0">
                 <a:solidFill>
-                  <a:srgbClr val="1AA3C4"/>
+                  <a:srgbClr val="8B4DDB"/>
                 </a:solidFill>
                 <a:latin typeface="Calibri" pitchFamily="34" charset="0"/>
                 <a:ea typeface="Calibri" pitchFamily="34" charset="-122"/>
                 <a:cs typeface="Calibri" pitchFamily="34" charset="-120"/>
               </a:rPr>
-              <a:t>实验设计</a:t>
+              <a:t>算法贡献 · 碎片化</a:t>
             </a:r>
             <a:endParaRPr lang="en-US" sz="1200" dirty="0"/>
           </a:p>
@@ -3331,6 +3420,549 @@
                 <a:ea typeface="Cambria" pitchFamily="34" charset="-122"/>
                 <a:cs typeface="Cambria" pitchFamily="34" charset="-120"/>
               </a:rPr>
+              <a:t>同一组算法，放回城市真实的不同运营商</a:t>
+            </a:r>
+            <a:endParaRPr lang="en-US" sz="2800" dirty="0"/>
+          </a:p>
+        </p:txBody>
+      </p:sp>
+      <p:pic>
+        <p:nvPicPr>
+          <p:cNvPr id="4" name="Image 0" descr="/home/user/Project1/figs/fig_optstop_ops.png">    </p:cNvPr>
+          <p:cNvPicPr>
+            <a:picLocks noChangeAspect="1"/>
+          </p:cNvPicPr>
+          <p:nvPr/>
+        </p:nvPicPr>
+        <p:blipFill>
+          <a:blip r:embed="rId1"/>
+          <a:stretch>
+            <a:fillRect/>
+          </a:stretch>
+        </p:blipFill>
+        <p:spPr>
+          <a:xfrm>
+            <a:off x="795528" y="1170432"/>
+            <a:ext cx="10607040" cy="3072723"/>
+          </a:xfrm>
+          <a:prstGeom prst="rect">
+            <a:avLst/>
+          </a:prstGeom>
+        </p:spPr>
+      </p:pic>
+      <p:sp>
+        <p:nvSpPr>
+          <p:cNvPr id="5" name="Shape 2"/>
+          <p:cNvSpPr/>
+          <p:nvPr/>
+        </p:nvSpPr>
+        <p:spPr>
+          <a:xfrm>
+            <a:off x="640080" y="4443984"/>
+            <a:ext cx="10927080" cy="603504"/>
+          </a:xfrm>
+          <a:prstGeom prst="roundRect">
+            <a:avLst>
+              <a:gd name="adj" fmla="val 12121"/>
+            </a:avLst>
+          </a:prstGeom>
+          <a:solidFill>
+            <a:srgbClr val="F1EEFB"/>
+          </a:solidFill>
+          <a:ln w="12700">
+            <a:solidFill>
+              <a:srgbClr val="C9B6EC"/>
+            </a:solidFill>
+            <a:prstDash val="solid"/>
+          </a:ln>
+        </p:spPr>
+      </p:sp>
+      <p:sp>
+        <p:nvSpPr>
+          <p:cNvPr id="6" name="Text 3"/>
+          <p:cNvSpPr txBox="1"/>
+          <p:nvPr/>
+        </p:nvSpPr>
+        <p:spPr>
+          <a:xfrm>
+            <a:off x="868680" y="4443984"/>
+            <a:ext cx="10515600" cy="603504"/>
+          </a:xfrm>
+          <a:prstGeom prst="rect">
+            <a:avLst/>
+          </a:prstGeom>
+          <a:noFill/>
+          <a:ln/>
+        </p:spPr>
+        <p:txBody>
+          <a:bodyPr wrap="square" lIns="0" tIns="0" rIns="0" bIns="0" rtlCol="0" anchor="ctr"/>
+          <a:lstStyle/>
+          <a:p>
+            <a:pPr algn="l" indent="0" marL="0">
+              <a:buNone/>
+            </a:pPr>
+            <a:r>
+              <a:rPr lang="en-US" sz="1300" b="1" dirty="0">
+                <a:solidFill>
+                  <a:srgbClr val="6A33C0"/>
+                </a:solidFill>
+                <a:latin typeface="Calibri" pitchFamily="34" charset="0"/>
+                <a:ea typeface="Calibri" pitchFamily="34" charset="-122"/>
+                <a:cs typeface="Calibri" pitchFamily="34" charset="-120"/>
+              </a:rPr>
+              <a:t>碎片化＝每家后台是不同的检测问题：</a:t>
+            </a:r>
+            <a:pPr algn="l" indent="0" marL="0">
+              <a:buNone/>
+            </a:pPr>
+            <a:r>
+              <a:rPr lang="en-US" sz="1300" dirty="0">
+                <a:solidFill>
+                  <a:srgbClr val="1A2633"/>
+                </a:solidFill>
+                <a:latin typeface="Calibri" pitchFamily="34" charset="0"/>
+                <a:ea typeface="Calibri" pitchFamily="34" charset="-122"/>
+                <a:cs typeface="Calibri" pitchFamily="34" charset="-120"/>
+              </a:rPr>
+              <a:t>小运营商样本少、信号更噪，代价比各异——单一全局固定阈值失控，而贝叶斯最优逐运营商自适应、始终最优。</a:t>
+            </a:r>
+            <a:endParaRPr lang="en-US" sz="1300" dirty="0"/>
+          </a:p>
+        </p:txBody>
+      </p:sp>
+      <p:sp>
+        <p:nvSpPr>
+          <p:cNvPr id="7" name="Shape 4"/>
+          <p:cNvSpPr/>
+          <p:nvPr/>
+        </p:nvSpPr>
+        <p:spPr>
+          <a:xfrm>
+            <a:off x="640080" y="5166360"/>
+            <a:ext cx="3429000" cy="1005840"/>
+          </a:xfrm>
+          <a:prstGeom prst="roundRect">
+            <a:avLst>
+              <a:gd name="adj" fmla="val 8182"/>
+            </a:avLst>
+          </a:prstGeom>
+          <a:solidFill>
+            <a:srgbClr val="F4F7FB"/>
+          </a:solidFill>
+          <a:ln w="12700">
+            <a:solidFill>
+              <a:srgbClr val="D7E0EA"/>
+            </a:solidFill>
+            <a:prstDash val="solid"/>
+          </a:ln>
+          <a:effectLst>
+            <a:outerShdw sx="100000" sy="100000" kx="0" ky="0" algn="bl" rotWithShape="0" blurRad="76200" dist="25400" dir="5400000">
+              <a:srgbClr val="B9C6D4">
+                <a:alpha val="30000"/>
+              </a:srgbClr>
+            </a:outerShdw>
+          </a:effectLst>
+        </p:spPr>
+      </p:sp>
+      <p:sp>
+        <p:nvSpPr>
+          <p:cNvPr id="8" name="Text 5"/>
+          <p:cNvSpPr txBox="1"/>
+          <p:nvPr/>
+        </p:nvSpPr>
+        <p:spPr>
+          <a:xfrm>
+            <a:off x="640080" y="5230368"/>
+            <a:ext cx="3429000" cy="502920"/>
+          </a:xfrm>
+          <a:prstGeom prst="rect">
+            <a:avLst/>
+          </a:prstGeom>
+          <a:noFill/>
+          <a:ln/>
+        </p:spPr>
+        <p:txBody>
+          <a:bodyPr wrap="square" lIns="0" tIns="0" rIns="0" bIns="0" rtlCol="0" anchor="ctr"/>
+          <a:lstStyle/>
+          <a:p>
+            <a:pPr algn="ctr" indent="0" marL="0">
+              <a:buNone/>
+            </a:pPr>
+            <a:r>
+              <a:rPr lang="en-US" sz="2300" b="1" dirty="0">
+                <a:solidFill>
+                  <a:srgbClr val="1AA3C4"/>
+                </a:solidFill>
+                <a:latin typeface="Cambria" pitchFamily="34" charset="0"/>
+                <a:ea typeface="Cambria" pitchFamily="34" charset="-122"/>
+                <a:cs typeface="Cambria" pitchFamily="34" charset="-120"/>
+              </a:rPr>
+              <a:t>下包络</a:t>
+            </a:r>
+            <a:endParaRPr lang="en-US" sz="2300" dirty="0"/>
+          </a:p>
+        </p:txBody>
+      </p:sp>
+      <p:sp>
+        <p:nvSpPr>
+          <p:cNvPr id="9" name="Text 6"/>
+          <p:cNvSpPr txBox="1"/>
+          <p:nvPr/>
+        </p:nvSpPr>
+        <p:spPr>
+          <a:xfrm>
+            <a:off x="749808" y="5760720"/>
+            <a:ext cx="3200400" cy="384048"/>
+          </a:xfrm>
+          <a:prstGeom prst="rect">
+            <a:avLst/>
+          </a:prstGeom>
+          <a:noFill/>
+          <a:ln/>
+        </p:spPr>
+        <p:txBody>
+          <a:bodyPr wrap="square" lIns="0" tIns="0" rIns="0" bIns="0" rtlCol="0" anchor="ctr"/>
+          <a:lstStyle/>
+          <a:p>
+            <a:pPr algn="ctr" indent="0" marL="0">
+              <a:buNone/>
+            </a:pPr>
+            <a:r>
+              <a:rPr lang="en-US" sz="1100" dirty="0">
+                <a:solidFill>
+                  <a:srgbClr val="5D6B7A"/>
+                </a:solidFill>
+                <a:latin typeface="Calibri" pitchFamily="34" charset="0"/>
+                <a:ea typeface="Calibri" pitchFamily="34" charset="-122"/>
+                <a:cs typeface="Calibri" pitchFamily="34" charset="-120"/>
+              </a:rPr>
+              <a:t>贝叶斯最优在全体运营商上损失最低</a:t>
+            </a:r>
+            <a:endParaRPr lang="en-US" sz="1100" dirty="0"/>
+          </a:p>
+        </p:txBody>
+      </p:sp>
+      <p:sp>
+        <p:nvSpPr>
+          <p:cNvPr id="10" name="Shape 7"/>
+          <p:cNvSpPr/>
+          <p:nvPr/>
+        </p:nvSpPr>
+        <p:spPr>
+          <a:xfrm>
+            <a:off x="4389120" y="5166360"/>
+            <a:ext cx="3429000" cy="1005840"/>
+          </a:xfrm>
+          <a:prstGeom prst="roundRect">
+            <a:avLst>
+              <a:gd name="adj" fmla="val 8182"/>
+            </a:avLst>
+          </a:prstGeom>
+          <a:solidFill>
+            <a:srgbClr val="F4F7FB"/>
+          </a:solidFill>
+          <a:ln w="12700">
+            <a:solidFill>
+              <a:srgbClr val="D7E0EA"/>
+            </a:solidFill>
+            <a:prstDash val="solid"/>
+          </a:ln>
+          <a:effectLst>
+            <a:outerShdw sx="100000" sy="100000" kx="0" ky="0" algn="bl" rotWithShape="0" blurRad="76200" dist="25400" dir="5400000">
+              <a:srgbClr val="B9C6D4">
+                <a:alpha val="30000"/>
+              </a:srgbClr>
+            </a:outerShdw>
+          </a:effectLst>
+        </p:spPr>
+      </p:sp>
+      <p:sp>
+        <p:nvSpPr>
+          <p:cNvPr id="11" name="Text 8"/>
+          <p:cNvSpPr txBox="1"/>
+          <p:nvPr/>
+        </p:nvSpPr>
+        <p:spPr>
+          <a:xfrm>
+            <a:off x="4389120" y="5230368"/>
+            <a:ext cx="3429000" cy="502920"/>
+          </a:xfrm>
+          <a:prstGeom prst="rect">
+            <a:avLst/>
+          </a:prstGeom>
+          <a:noFill/>
+          <a:ln/>
+        </p:spPr>
+        <p:txBody>
+          <a:bodyPr wrap="square" lIns="0" tIns="0" rIns="0" bIns="0" rtlCol="0" anchor="ctr"/>
+          <a:lstStyle/>
+          <a:p>
+            <a:pPr algn="ctr" indent="0" marL="0">
+              <a:buNone/>
+            </a:pPr>
+            <a:r>
+              <a:rPr lang="en-US" sz="2300" b="1" dirty="0">
+                <a:solidFill>
+                  <a:srgbClr val="1EA97C"/>
+                </a:solidFill>
+                <a:latin typeface="Cambria" pitchFamily="34" charset="0"/>
+                <a:ea typeface="Cambria" pitchFamily="34" charset="-122"/>
+                <a:cs typeface="Cambria" pitchFamily="34" charset="-120"/>
+              </a:rPr>
+              <a:t>−73%</a:t>
+            </a:r>
+            <a:endParaRPr lang="en-US" sz="2300" dirty="0"/>
+          </a:p>
+        </p:txBody>
+      </p:sp>
+      <p:sp>
+        <p:nvSpPr>
+          <p:cNvPr id="12" name="Text 9"/>
+          <p:cNvSpPr txBox="1"/>
+          <p:nvPr/>
+        </p:nvSpPr>
+        <p:spPr>
+          <a:xfrm>
+            <a:off x="4498848" y="5760720"/>
+            <a:ext cx="3200400" cy="384048"/>
+          </a:xfrm>
+          <a:prstGeom prst="rect">
+            <a:avLst/>
+          </a:prstGeom>
+          <a:noFill/>
+          <a:ln/>
+        </p:spPr>
+        <p:txBody>
+          <a:bodyPr wrap="square" lIns="0" tIns="0" rIns="0" bIns="0" rtlCol="0" anchor="ctr"/>
+          <a:lstStyle/>
+          <a:p>
+            <a:pPr algn="ctr" indent="0" marL="0">
+              <a:buNone/>
+            </a:pPr>
+            <a:r>
+              <a:rPr lang="en-US" sz="1100" dirty="0">
+                <a:solidFill>
+                  <a:srgbClr val="5D6B7A"/>
+                </a:solidFill>
+                <a:latin typeface="Calibri" pitchFamily="34" charset="0"/>
+                <a:ea typeface="Calibri" pitchFamily="34" charset="-122"/>
+                <a:cs typeface="Calibri" pitchFamily="34" charset="-120"/>
+              </a:rPr>
+              <a:t>全队平均损失 vs 固定规则（较最好 ML 低逾半）</a:t>
+            </a:r>
+            <a:endParaRPr lang="en-US" sz="1100" dirty="0"/>
+          </a:p>
+        </p:txBody>
+      </p:sp>
+      <p:sp>
+        <p:nvSpPr>
+          <p:cNvPr id="13" name="Shape 10"/>
+          <p:cNvSpPr/>
+          <p:nvPr/>
+        </p:nvSpPr>
+        <p:spPr>
+          <a:xfrm>
+            <a:off x="8138160" y="5166360"/>
+            <a:ext cx="3429000" cy="1005840"/>
+          </a:xfrm>
+          <a:prstGeom prst="roundRect">
+            <a:avLst>
+              <a:gd name="adj" fmla="val 8182"/>
+            </a:avLst>
+          </a:prstGeom>
+          <a:solidFill>
+            <a:srgbClr val="F4F7FB"/>
+          </a:solidFill>
+          <a:ln w="12700">
+            <a:solidFill>
+              <a:srgbClr val="D7E0EA"/>
+            </a:solidFill>
+            <a:prstDash val="solid"/>
+          </a:ln>
+          <a:effectLst>
+            <a:outerShdw sx="100000" sy="100000" kx="0" ky="0" algn="bl" rotWithShape="0" blurRad="76200" dist="25400" dir="5400000">
+              <a:srgbClr val="B9C6D4">
+                <a:alpha val="30000"/>
+              </a:srgbClr>
+            </a:outerShdw>
+          </a:effectLst>
+        </p:spPr>
+      </p:sp>
+      <p:sp>
+        <p:nvSpPr>
+          <p:cNvPr id="14" name="Text 11"/>
+          <p:cNvSpPr txBox="1"/>
+          <p:nvPr/>
+        </p:nvSpPr>
+        <p:spPr>
+          <a:xfrm>
+            <a:off x="8138160" y="5230368"/>
+            <a:ext cx="3429000" cy="502920"/>
+          </a:xfrm>
+          <a:prstGeom prst="rect">
+            <a:avLst/>
+          </a:prstGeom>
+          <a:noFill/>
+          <a:ln/>
+        </p:spPr>
+        <p:txBody>
+          <a:bodyPr wrap="square" lIns="0" tIns="0" rIns="0" bIns="0" rtlCol="0" anchor="ctr"/>
+          <a:lstStyle/>
+          <a:p>
+            <a:pPr algn="ctr" indent="0" marL="0">
+              <a:buNone/>
+            </a:pPr>
+            <a:r>
+              <a:rPr lang="en-US" sz="1800" b="1" dirty="0">
+                <a:solidFill>
+                  <a:srgbClr val="0F3D57"/>
+                </a:solidFill>
+                <a:latin typeface="Cambria" pitchFamily="34" charset="0"/>
+                <a:ea typeface="Cambria" pitchFamily="34" charset="-122"/>
+                <a:cs typeface="Cambria" pitchFamily="34" charset="-120"/>
+              </a:rPr>
+              <a:t>A*: 0.08→0.98</a:t>
+            </a:r>
+            <a:endParaRPr lang="en-US" sz="1800" dirty="0"/>
+          </a:p>
+        </p:txBody>
+      </p:sp>
+      <p:sp>
+        <p:nvSpPr>
+          <p:cNvPr id="15" name="Text 12"/>
+          <p:cNvSpPr txBox="1"/>
+          <p:nvPr/>
+        </p:nvSpPr>
+        <p:spPr>
+          <a:xfrm>
+            <a:off x="8247888" y="5760720"/>
+            <a:ext cx="3200400" cy="384048"/>
+          </a:xfrm>
+          <a:prstGeom prst="rect">
+            <a:avLst/>
+          </a:prstGeom>
+          <a:noFill/>
+          <a:ln/>
+        </p:spPr>
+        <p:txBody>
+          <a:bodyPr wrap="square" lIns="0" tIns="0" rIns="0" bIns="0" rtlCol="0" anchor="ctr"/>
+          <a:lstStyle/>
+          <a:p>
+            <a:pPr algn="ctr" indent="0" marL="0">
+              <a:buNone/>
+            </a:pPr>
+            <a:r>
+              <a:rPr lang="en-US" sz="1100" dirty="0">
+                <a:solidFill>
+                  <a:srgbClr val="5D6B7A"/>
+                </a:solidFill>
+                <a:latin typeface="Calibri" pitchFamily="34" charset="0"/>
+                <a:ea typeface="Calibri" pitchFamily="34" charset="-122"/>
+                <a:cs typeface="Calibri" pitchFamily="34" charset="-120"/>
+              </a:rPr>
+              <a:t>最优隔离阈值随运营商自适应</a:t>
+            </a:r>
+            <a:endParaRPr lang="en-US" sz="1100" dirty="0"/>
+          </a:p>
+        </p:txBody>
+      </p:sp>
+    </p:spTree>
+  </p:cSld>
+  <p:clrMapOvr>
+    <a:masterClrMapping/>
+  </p:clrMapOvr>
+</p:sld>
+</file>
+
+<file path=ppt/slides/slide12.xml><?xml version="1.0" encoding="utf-8"?>
+<p:sld xmlns:a="http://schemas.openxmlformats.org/drawingml/2006/main" xmlns:r="http://schemas.openxmlformats.org/officeDocument/2006/relationships" xmlns:p="http://schemas.openxmlformats.org/presentationml/2006/main">
+  <p:cSld name="Slide 12">
+    <p:spTree>
+      <p:nvGrpSpPr>
+        <p:cNvPr id="1" name=""/>
+        <p:cNvGrpSpPr/>
+        <p:nvPr/>
+      </p:nvGrpSpPr>
+      <p:grpSpPr>
+        <a:xfrm>
+          <a:off x="0" y="0"/>
+          <a:ext cx="0" cy="0"/>
+          <a:chOff x="0" y="0"/>
+          <a:chExt cx="0" cy="0"/>
+        </a:xfrm>
+      </p:grpSpPr>
+      <p:sp>
+        <p:nvSpPr>
+          <p:cNvPr id="2" name="Text 0"/>
+          <p:cNvSpPr txBox="1"/>
+          <p:nvPr/>
+        </p:nvSpPr>
+        <p:spPr>
+          <a:xfrm>
+            <a:off x="566928" y="146304"/>
+            <a:ext cx="10972800" cy="274320"/>
+          </a:xfrm>
+          <a:prstGeom prst="rect">
+            <a:avLst/>
+          </a:prstGeom>
+          <a:noFill/>
+          <a:ln/>
+        </p:spPr>
+        <p:txBody>
+          <a:bodyPr wrap="square" lIns="0" tIns="0" rIns="0" bIns="0" rtlCol="0" anchor="ctr"/>
+          <a:lstStyle/>
+          <a:p>
+            <a:pPr indent="0" marL="0">
+              <a:buNone/>
+            </a:pPr>
+            <a:r>
+              <a:rPr lang="en-US" sz="1200" b="1" spc="200" kern="0" dirty="0">
+                <a:solidFill>
+                  <a:srgbClr val="1AA3C4"/>
+                </a:solidFill>
+                <a:latin typeface="Calibri" pitchFamily="34" charset="0"/>
+                <a:ea typeface="Calibri" pitchFamily="34" charset="-122"/>
+                <a:cs typeface="Calibri" pitchFamily="34" charset="-120"/>
+              </a:rPr>
+              <a:t>实验设计</a:t>
+            </a:r>
+            <a:endParaRPr lang="en-US" sz="1200" dirty="0"/>
+          </a:p>
+        </p:txBody>
+      </p:sp>
+      <p:sp>
+        <p:nvSpPr>
+          <p:cNvPr id="3" name="Text 1"/>
+          <p:cNvSpPr txBox="1"/>
+          <p:nvPr/>
+        </p:nvSpPr>
+        <p:spPr>
+          <a:xfrm>
+            <a:off x="548640" y="329184"/>
+            <a:ext cx="11064240" cy="731520"/>
+          </a:xfrm>
+          <a:prstGeom prst="rect">
+            <a:avLst/>
+          </a:prstGeom>
+          <a:noFill/>
+          <a:ln/>
+        </p:spPr>
+        <p:txBody>
+          <a:bodyPr wrap="square" lIns="0" tIns="0" rIns="0" bIns="0" rtlCol="0" anchor="ctr"/>
+          <a:lstStyle/>
+          <a:p>
+            <a:pPr algn="l" indent="0" marL="0">
+              <a:buNone/>
+            </a:pPr>
+            <a:r>
+              <a:rPr lang="en-US" sz="2800" b="1" dirty="0">
+                <a:solidFill>
+                  <a:srgbClr val="0F3D57"/>
+                </a:solidFill>
+                <a:latin typeface="Cambria" pitchFamily="34" charset="0"/>
+                <a:ea typeface="Cambria" pitchFamily="34" charset="-122"/>
+                <a:cs typeface="Cambria" pitchFamily="34" charset="-120"/>
+              </a:rPr>
               <a:t>场景矩阵与评价口径</a:t>
             </a:r>
             <a:endParaRPr lang="en-US" sz="2800" dirty="0"/>
@@ -3339,7 +3971,7 @@
       </p:sp>
       <p:graphicFrame>
         <p:nvGraphicFramePr>
-          <p:cNvPr id="12" name="Table 0"/>
+          <p:cNvPr id="13" name="Table 0"/>
           <p:cNvGraphicFramePr>
             <a:graphicFrameLocks noGrp="1"/>
           </p:cNvGraphicFramePr>
@@ -4323,9 +4955,9 @@
 </p:sld>
 </file>
 
-<file path=ppt/slides/slide12.xml><?xml version="1.0" encoding="utf-8"?>
+<file path=ppt/slides/slide13.xml><?xml version="1.0" encoding="utf-8"?>
 <p:sld xmlns:a="http://schemas.openxmlformats.org/drawingml/2006/main" xmlns:r="http://schemas.openxmlformats.org/officeDocument/2006/relationships" xmlns:p="http://schemas.openxmlformats.org/presentationml/2006/main">
-  <p:cSld name="Slide 12">
+  <p:cSld name="Slide 13">
     <p:spTree>
       <p:nvGrpSpPr>
         <p:cNvPr id="1" name=""/>
@@ -4898,9 +5530,9 @@
 </p:sld>
 </file>
 
-<file path=ppt/slides/slide13.xml><?xml version="1.0" encoding="utf-8"?>
+<file path=ppt/slides/slide14.xml><?xml version="1.0" encoding="utf-8"?>
 <p:sld xmlns:a="http://schemas.openxmlformats.org/drawingml/2006/main" xmlns:r="http://schemas.openxmlformats.org/officeDocument/2006/relationships" xmlns:p="http://schemas.openxmlformats.org/presentationml/2006/main">
-  <p:cSld name="Slide 13">
+  <p:cSld name="Slide 14">
     <p:spTree>
       <p:nvGrpSpPr>
         <p:cNvPr id="1" name=""/>

--- a/巴塞罗那充电安全_方法建模协议科普PPT.pptx
+++ b/巴塞罗那充电安全_方法建模协议科普PPT.pptx
@@ -19,9 +19,10 @@
     <p:sldId id="267" r:id="rId13"/>
     <p:sldId id="268" r:id="rId14"/>
     <p:sldId id="269" r:id="rId15"/>
+    <p:sldId id="270" r:id="rId16"/>
   </p:sldIdLst>
   <p:notesMasterIdLst>
-    <p:notesMasterId r:id="rId16"/>
+    <p:notesMasterId r:id="rId17"/>
   </p:notesMasterIdLst>
   <p:sldSz cx="12191695" cy="6858000"/>
   <p:notesSz cx="6858000" cy="12191695"/>
@@ -603,7 +604,7 @@
           <a:p>
             <a:r>
               <a:rPr lang="en-US" dirty="0"/>
-              <a:t>算法贡献:把'何时隔离'建成贝叶斯快速变点检测/最优停止,求出最优阈值A*。固定规则真实噪声下误隔离76%;最优策略降期望损失84%。这就是'用算法解决问题',不只是分析。</a:t>
+              <a:t>算法贡献:把'何时隔离'建成贝叶斯快速变点检测/最优停止,求出最优阈值A*。固定规则真实噪声下误隔离76%;最优策略降期望损失85%。这就是'用算法解决问题',不只是分析。</a:t>
             </a:r>
             <a:endParaRPr lang="en-US" dirty="0"/>
           </a:p>
@@ -691,7 +692,7 @@
           <a:p>
             <a:r>
               <a:rPr lang="en-US" dirty="0"/>
-              <a:t>算法×碎片化:把六法对比放回真实的8家运营商(规模3-138点)逐一标定。噪声随规模(小运营商更噪)、代价比随构成。贝叶斯最优是全体下包络(全队再降73%),且A*随运营商0.08→0.98自适应。固定规则只有一个阈值,在噪声大的小运营商失控。这回应'要用真实不同运营商对比算法',并保留碎片化视角。</a:t>
+              <a:t>算法×碎片化:把八法对比放回真实的8家运营商(规模3-138点)逐一标定。噪声随规模(小运营商更噪)、代价比随构成。贝叶斯最优是全体下包络(全队再降73%),且A*随运营商0.08→0.98自适应。固定规则只有一个阈值,在噪声大的小运营商失控。这回应'要用真实不同运营商对比算法',并保留碎片化视角。</a:t>
             </a:r>
             <a:endParaRPr lang="en-US" dirty="0"/>
           </a:p>
@@ -779,7 +780,7 @@
           <a:p>
             <a:r>
               <a:rPr lang="en-US" dirty="0"/>
-              <a:t>实验设计：四维场景矩阵(攻击位置×协议版本×防御×范围)；主指标=被发现前损失+τ_d+误报率；可复现(固定种子、3次中位数、真实异常做闸门)。</a:t>
+              <a:t>消融与对抗:检测两信号互补(速率对A1失明)、隔离决定性、碎片化反事实(1/4.5)、诚实盲区(极隐蔽攻击);真实数据安全门FPR0.29%、同步门36→0;贝叶斯vsCUSUM不可区分。回应'缺基线对比/消融'。</a:t>
             </a:r>
             <a:endParaRPr lang="en-US" dirty="0"/>
           </a:p>
@@ -867,7 +868,7 @@
           <a:p>
             <a:r>
               <a:rPr lang="en-US" dirty="0"/>
-              <a:t>结果：单后台2.6-12.3MW→隔离后&lt;10kWh(&gt;99%)；协同5家11889→26.5kWh；电网0.16%。图是协同campaign累积曲线(红升绿平)。</a:t>
+              <a:t>实验设计：四维场景矩阵(攻击位置×协议版本×防御×范围)；主指标=被发现前损失+τ_d+误报率；可复现(固定种子、3次中位数、真实异常做闸门)。</a:t>
             </a:r>
             <a:endParaRPr lang="en-US" dirty="0"/>
           </a:p>
@@ -955,7 +956,7 @@
           <a:p>
             <a:r>
               <a:rPr lang="en-US" dirty="0"/>
-              <a:t>结论：方法可核查、建模够真、协议是关键、现实指导。一句话：电网不是主战场，网络层才是；碎片化+检测隔离让攻击几乎无损。</a:t>
+              <a:t>结果：单后台2.6-12.3MW→隔离后&lt;10kWh(&gt;99%)；协同5家11889→26.5kWh；电网0.16%。图是协同campaign累积曲线(红升绿平)。</a:t>
             </a:r>
             <a:endParaRPr lang="en-US" dirty="0"/>
           </a:p>
@@ -979,6 +980,94 @@
             <a:fld id="{F7021451-1387-4CA6-816F-3879F97B5CBC}" type="slidenum">
               <a:rPr lang="en-US"/>
               <a:t>14</a:t>
+            </a:fld>
+            <a:endParaRPr lang="en-US"/>
+          </a:p>
+        </p:txBody>
+      </p:sp>
+    </p:spTree>
+    <p:extLst>
+      <p:ext uri="{BB962C8B-B14F-4D97-AF65-F5344CB8AC3E}">
+        <p14:creationId xmlns:p14="http://schemas.microsoft.com/office/powerpoint/2010/main" val="1024086991"/>
+      </p:ext>
+    </p:extLst>
+  </p:cSld>
+  <p:clrMapOvr>
+    <a:masterClrMapping/>
+  </p:clrMapOvr>
+</p:notes>
+</file>
+
+<file path=ppt/notesSlides/notesSlide15.xml><?xml version="1.0" encoding="utf-8"?>
+<p:notes xmlns:a="http://schemas.openxmlformats.org/drawingml/2006/main" xmlns:r="http://schemas.openxmlformats.org/officeDocument/2006/relationships" xmlns:p="http://schemas.openxmlformats.org/presentationml/2006/main">
+  <p:cSld>
+    <p:spTree>
+      <p:nvGrpSpPr>
+        <p:cNvPr id="1" name=""/>
+        <p:cNvGrpSpPr/>
+        <p:nvPr/>
+      </p:nvGrpSpPr>
+      <p:grpSpPr>
+        <a:xfrm>
+          <a:off x="0" y="0"/>
+          <a:ext cx="0" cy="0"/>
+          <a:chOff x="0" y="0"/>
+          <a:chExt cx="0" cy="0"/>
+        </a:xfrm>
+      </p:grpSpPr>
+      <p:sp>
+        <p:nvSpPr>
+          <p:cNvPr id="2" name="Slide Image Placeholder 1"/>
+          <p:cNvSpPr>
+            <a:spLocks noGrp="1" noRot="1" noChangeAspect="1"/>
+          </p:cNvSpPr>
+          <p:nvPr>
+            <p:ph type="sldImg"/>
+          </p:nvPr>
+        </p:nvSpPr>
+        <p:spPr/>
+      </p:sp>
+      <p:sp>
+        <p:nvSpPr>
+          <p:cNvPr id="3" name="Notes Placeholder 2"/>
+          <p:cNvSpPr>
+            <a:spLocks noGrp="1"/>
+          </p:cNvSpPr>
+          <p:nvPr>
+            <p:ph type="body" idx="1"/>
+          </p:nvPr>
+        </p:nvSpPr>
+        <p:spPr/>
+        <p:txBody>
+          <a:bodyPr/>
+          <a:lstStyle/>
+          <a:p>
+            <a:r>
+              <a:rPr lang="en-US" dirty="0"/>
+              <a:t>结论：方法可核查、建模够真、协议是关键、现实指导。一句话：电网不是主战场，网络层才是；碎片化+检测隔离让攻击几乎无损。</a:t>
+            </a:r>
+            <a:endParaRPr lang="en-US" dirty="0"/>
+          </a:p>
+        </p:txBody>
+      </p:sp>
+      <p:sp>
+        <p:nvSpPr>
+          <p:cNvPr id="4" name="Slide Number Placeholder 3"/>
+          <p:cNvSpPr>
+            <a:spLocks noGrp="1"/>
+          </p:cNvSpPr>
+          <p:nvPr>
+            <p:ph type="sldNum" sz="quarter" idx="10"/>
+          </p:nvPr>
+        </p:nvSpPr>
+        <p:spPr/>
+        <p:txBody>
+          <a:bodyPr/>
+          <a:lstStyle/>
+          <a:p>
+            <a:fld id="{F7021451-1387-4CA6-816F-3879F97B5CBC}" type="slidenum">
+              <a:rPr lang="en-US"/>
+              <a:t>15</a:t>
             </a:fld>
             <a:endParaRPr lang="en-US"/>
           </a:p>
@@ -2936,7 +3025,7 @@
                 <a:ea typeface="Calibri" pitchFamily="34" charset="-122"/>
                 <a:cs typeface="Calibri" pitchFamily="34" charset="-120"/>
               </a:rPr>
-              <a:t>六法对比：最优策略严格优于 CUSUM、学习型 ML（孤立森林/单类SVM）与固定规则。</a:t>
+              <a:t>八法对比：最优策略与 CUSUM/EWMA/GLR 同处前沿，共同优于学习型 ML（孤立森林/单类SVM）与固定规则。</a:t>
             </a:r>
             <a:endParaRPr lang="en-US" sz="1300" dirty="0"/>
           </a:p>
@@ -2957,7 +3046,7 @@
                 <a:ea typeface="Calibri" pitchFamily="34" charset="-122"/>
                 <a:cs typeface="Calibri" pitchFamily="34" charset="-120"/>
               </a:rPr>
-              <a:t>发现：真实噪声下固定规则误隔离 76%；最优策略降期望损失 84%，越隐蔽、误隔离代价越高优势越大。</a:t>
+              <a:t>发现：真实噪声下固定规则误隔离 76%；最优策略降期望损失 85%，越隐蔽、误隔离代价越高优势越大。</a:t>
             </a:r>
             <a:endParaRPr lang="en-US" sz="1300" dirty="0"/>
           </a:p>
@@ -3054,7 +3143,7 @@
                 <a:ea typeface="Cambria" pitchFamily="34" charset="-122"/>
                 <a:cs typeface="Cambria" pitchFamily="34" charset="-120"/>
               </a:rPr>
-              <a:t>−84%</a:t>
+              <a:t>−85%</a:t>
             </a:r>
             <a:endParaRPr lang="en-US" sz="2300" dirty="0"/>
           </a:p>
@@ -3918,13 +4007,13 @@
             <a:r>
               <a:rPr lang="en-US" sz="1200" b="1" spc="200" kern="0" dirty="0">
                 <a:solidFill>
-                  <a:srgbClr val="1AA3C4"/>
+                  <a:srgbClr val="E8384F"/>
                 </a:solidFill>
                 <a:latin typeface="Calibri" pitchFamily="34" charset="0"/>
                 <a:ea typeface="Calibri" pitchFamily="34" charset="-122"/>
                 <a:cs typeface="Calibri" pitchFamily="34" charset="-120"/>
               </a:rPr>
-              <a:t>实验设计</a:t>
+              <a:t>消融 · 对抗稳健 · 诚实边界</a:t>
             </a:r>
             <a:endParaRPr lang="en-US" sz="1200" dirty="0"/>
           </a:p>
@@ -3963,6 +4052,717 @@
                 <a:ea typeface="Cambria" pitchFamily="34" charset="-122"/>
                 <a:cs typeface="Cambria" pitchFamily="34" charset="-120"/>
               </a:rPr>
+              <a:t>拆开验证每一部分，并直面自适应攻击者</a:t>
+            </a:r>
+            <a:endParaRPr lang="en-US" sz="2800" dirty="0"/>
+          </a:p>
+        </p:txBody>
+      </p:sp>
+      <p:sp>
+        <p:nvSpPr>
+          <p:cNvPr id="4" name="Shape 2"/>
+          <p:cNvSpPr/>
+          <p:nvPr/>
+        </p:nvSpPr>
+        <p:spPr>
+          <a:xfrm>
+            <a:off x="640080" y="1508760"/>
+            <a:ext cx="5349240" cy="1600200"/>
+          </a:xfrm>
+          <a:prstGeom prst="roundRect">
+            <a:avLst>
+              <a:gd name="adj" fmla="val 5143"/>
+            </a:avLst>
+          </a:prstGeom>
+          <a:solidFill>
+            <a:srgbClr val="F4F7FB"/>
+          </a:solidFill>
+          <a:ln w="12700">
+            <a:solidFill>
+              <a:srgbClr val="D7E0EA"/>
+            </a:solidFill>
+            <a:prstDash val="solid"/>
+          </a:ln>
+          <a:effectLst>
+            <a:outerShdw sx="100000" sy="100000" kx="0" ky="0" algn="bl" rotWithShape="0" blurRad="76200" dist="25400" dir="5400000">
+              <a:srgbClr val="B9C6D4">
+                <a:alpha val="30000"/>
+              </a:srgbClr>
+            </a:outerShdw>
+          </a:effectLst>
+        </p:spPr>
+      </p:sp>
+      <p:sp>
+        <p:nvSpPr>
+          <p:cNvPr id="5" name="Shape 3"/>
+          <p:cNvSpPr/>
+          <p:nvPr/>
+        </p:nvSpPr>
+        <p:spPr>
+          <a:xfrm>
+            <a:off x="640080" y="1508760"/>
+            <a:ext cx="128016" cy="1600200"/>
+          </a:xfrm>
+          <a:prstGeom prst="roundRect">
+            <a:avLst/>
+          </a:prstGeom>
+          <a:solidFill>
+            <a:srgbClr val="1AA3C4"/>
+          </a:solidFill>
+          <a:ln/>
+        </p:spPr>
+      </p:sp>
+      <p:sp>
+        <p:nvSpPr>
+          <p:cNvPr id="6" name="Text 4"/>
+          <p:cNvSpPr txBox="1"/>
+          <p:nvPr/>
+        </p:nvSpPr>
+        <p:spPr>
+          <a:xfrm>
+            <a:off x="914400" y="1655064"/>
+            <a:ext cx="4937760" cy="457200"/>
+          </a:xfrm>
+          <a:prstGeom prst="rect">
+            <a:avLst/>
+          </a:prstGeom>
+          <a:noFill/>
+          <a:ln/>
+        </p:spPr>
+        <p:txBody>
+          <a:bodyPr wrap="square" lIns="0" tIns="0" rIns="0" bIns="0" rtlCol="0" anchor="ctr"/>
+          <a:lstStyle/>
+          <a:p>
+            <a:pPr indent="0" marL="0">
+              <a:buNone/>
+            </a:pPr>
+            <a:r>
+              <a:rPr lang="en-US" sz="1600" b="1" dirty="0">
+                <a:solidFill>
+                  <a:srgbClr val="1AA3C4"/>
+                </a:solidFill>
+                <a:latin typeface="Cambria" pitchFamily="34" charset="0"/>
+                <a:ea typeface="Cambria" pitchFamily="34" charset="-122"/>
+                <a:cs typeface="Cambria" pitchFamily="34" charset="-120"/>
+              </a:rPr>
+              <a:t>检测两信号互补</a:t>
+            </a:r>
+            <a:endParaRPr lang="en-US" sz="1600" dirty="0"/>
+          </a:p>
+        </p:txBody>
+      </p:sp>
+      <p:sp>
+        <p:nvSpPr>
+          <p:cNvPr id="7" name="Text 5"/>
+          <p:cNvSpPr txBox="1"/>
+          <p:nvPr/>
+        </p:nvSpPr>
+        <p:spPr>
+          <a:xfrm>
+            <a:off x="914400" y="2130552"/>
+            <a:ext cx="4937760" cy="914400"/>
+          </a:xfrm>
+          <a:prstGeom prst="rect">
+            <a:avLst/>
+          </a:prstGeom>
+          <a:noFill/>
+          <a:ln/>
+        </p:spPr>
+        <p:txBody>
+          <a:bodyPr wrap="square" lIns="0" tIns="0" rIns="0" bIns="0" rtlCol="0" anchor="t"/>
+          <a:lstStyle/>
+          <a:p>
+            <a:pPr algn="l" indent="0" marL="0">
+              <a:buNone/>
+            </a:pPr>
+            <a:r>
+              <a:rPr lang="en-US" sz="1250" dirty="0">
+                <a:solidFill>
+                  <a:srgbClr val="1A2633"/>
+                </a:solidFill>
+                <a:latin typeface="Calibri" pitchFamily="34" charset="0"/>
+                <a:ea typeface="Calibri" pitchFamily="34" charset="-122"/>
+                <a:cs typeface="Calibri" pitchFamily="34" charset="-120"/>
+              </a:rPr>
+              <a:t>仅“指令速率”对篡改电表(无指令)完全失明(残留100%)；物理一致性是无指令/浅度攻击的唯一防线。</a:t>
+            </a:r>
+            <a:endParaRPr lang="en-US" sz="1250" dirty="0"/>
+          </a:p>
+        </p:txBody>
+      </p:sp>
+      <p:sp>
+        <p:nvSpPr>
+          <p:cNvPr id="8" name="Shape 6"/>
+          <p:cNvSpPr/>
+          <p:nvPr/>
+        </p:nvSpPr>
+        <p:spPr>
+          <a:xfrm>
+            <a:off x="6217920" y="1508760"/>
+            <a:ext cx="5349240" cy="1600200"/>
+          </a:xfrm>
+          <a:prstGeom prst="roundRect">
+            <a:avLst>
+              <a:gd name="adj" fmla="val 5143"/>
+            </a:avLst>
+          </a:prstGeom>
+          <a:solidFill>
+            <a:srgbClr val="F4F7FB"/>
+          </a:solidFill>
+          <a:ln w="12700">
+            <a:solidFill>
+              <a:srgbClr val="D7E0EA"/>
+            </a:solidFill>
+            <a:prstDash val="solid"/>
+          </a:ln>
+          <a:effectLst>
+            <a:outerShdw sx="100000" sy="100000" kx="0" ky="0" algn="bl" rotWithShape="0" blurRad="76200" dist="25400" dir="5400000">
+              <a:srgbClr val="B9C6D4">
+                <a:alpha val="30000"/>
+              </a:srgbClr>
+            </a:outerShdw>
+          </a:effectLst>
+        </p:spPr>
+      </p:sp>
+      <p:sp>
+        <p:nvSpPr>
+          <p:cNvPr id="9" name="Shape 7"/>
+          <p:cNvSpPr/>
+          <p:nvPr/>
+        </p:nvSpPr>
+        <p:spPr>
+          <a:xfrm>
+            <a:off x="6217920" y="1508760"/>
+            <a:ext cx="128016" cy="1600200"/>
+          </a:xfrm>
+          <a:prstGeom prst="roundRect">
+            <a:avLst/>
+          </a:prstGeom>
+          <a:solidFill>
+            <a:srgbClr val="1EA97C"/>
+          </a:solidFill>
+          <a:ln/>
+        </p:spPr>
+      </p:sp>
+      <p:sp>
+        <p:nvSpPr>
+          <p:cNvPr id="10" name="Text 8"/>
+          <p:cNvSpPr txBox="1"/>
+          <p:nvPr/>
+        </p:nvSpPr>
+        <p:spPr>
+          <a:xfrm>
+            <a:off x="6492240" y="1655064"/>
+            <a:ext cx="4937760" cy="457200"/>
+          </a:xfrm>
+          <a:prstGeom prst="rect">
+            <a:avLst/>
+          </a:prstGeom>
+          <a:noFill/>
+          <a:ln/>
+        </p:spPr>
+        <p:txBody>
+          <a:bodyPr wrap="square" lIns="0" tIns="0" rIns="0" bIns="0" rtlCol="0" anchor="ctr"/>
+          <a:lstStyle/>
+          <a:p>
+            <a:pPr indent="0" marL="0">
+              <a:buNone/>
+            </a:pPr>
+            <a:r>
+              <a:rPr lang="en-US" sz="1600" b="1" dirty="0">
+                <a:solidFill>
+                  <a:srgbClr val="1EA97C"/>
+                </a:solidFill>
+                <a:latin typeface="Cambria" pitchFamily="34" charset="0"/>
+                <a:ea typeface="Cambria" pitchFamily="34" charset="-122"/>
+                <a:cs typeface="Cambria" pitchFamily="34" charset="-120"/>
+              </a:rPr>
+              <a:t>隔离是决定性层</a:t>
+            </a:r>
+            <a:endParaRPr lang="en-US" sz="1600" dirty="0"/>
+          </a:p>
+        </p:txBody>
+      </p:sp>
+      <p:sp>
+        <p:nvSpPr>
+          <p:cNvPr id="11" name="Text 9"/>
+          <p:cNvSpPr txBox="1"/>
+          <p:nvPr/>
+        </p:nvSpPr>
+        <p:spPr>
+          <a:xfrm>
+            <a:off x="6492240" y="2130552"/>
+            <a:ext cx="4937760" cy="914400"/>
+          </a:xfrm>
+          <a:prstGeom prst="rect">
+            <a:avLst/>
+          </a:prstGeom>
+          <a:noFill/>
+          <a:ln/>
+        </p:spPr>
+        <p:txBody>
+          <a:bodyPr wrap="square" lIns="0" tIns="0" rIns="0" bIns="0" rtlCol="0" anchor="t"/>
+          <a:lstStyle/>
+          <a:p>
+            <a:pPr algn="l" indent="0" marL="0">
+              <a:buNone/>
+            </a:pPr>
+            <a:r>
+              <a:rPr lang="en-US" sz="1250" dirty="0">
+                <a:solidFill>
+                  <a:srgbClr val="1A2633"/>
+                </a:solidFill>
+                <a:latin typeface="Calibri" pitchFamily="34" charset="0"/>
+                <a:ea typeface="Calibri" pitchFamily="34" charset="-122"/>
+                <a:cs typeface="Calibri" pitchFamily="34" charset="-120"/>
+              </a:rPr>
+              <a:t>仅检测/仅限速几乎不减损(8159→7548)；加隔离→&lt;1%(20.9)，限速+隔离最小爆炸半径(8.1kWh/18站)。</a:t>
+            </a:r>
+            <a:endParaRPr lang="en-US" sz="1250" dirty="0"/>
+          </a:p>
+        </p:txBody>
+      </p:sp>
+      <p:sp>
+        <p:nvSpPr>
+          <p:cNvPr id="12" name="Shape 10"/>
+          <p:cNvSpPr/>
+          <p:nvPr/>
+        </p:nvSpPr>
+        <p:spPr>
+          <a:xfrm>
+            <a:off x="640080" y="3291840"/>
+            <a:ext cx="5349240" cy="1600200"/>
+          </a:xfrm>
+          <a:prstGeom prst="roundRect">
+            <a:avLst>
+              <a:gd name="adj" fmla="val 5143"/>
+            </a:avLst>
+          </a:prstGeom>
+          <a:solidFill>
+            <a:srgbClr val="F4F7FB"/>
+          </a:solidFill>
+          <a:ln w="12700">
+            <a:solidFill>
+              <a:srgbClr val="D7E0EA"/>
+            </a:solidFill>
+            <a:prstDash val="solid"/>
+          </a:ln>
+          <a:effectLst>
+            <a:outerShdw sx="100000" sy="100000" kx="0" ky="0" algn="bl" rotWithShape="0" blurRad="76200" dist="25400" dir="5400000">
+              <a:srgbClr val="B9C6D4">
+                <a:alpha val="30000"/>
+              </a:srgbClr>
+            </a:outerShdw>
+          </a:effectLst>
+        </p:spPr>
+      </p:sp>
+      <p:sp>
+        <p:nvSpPr>
+          <p:cNvPr id="13" name="Shape 11"/>
+          <p:cNvSpPr/>
+          <p:nvPr/>
+        </p:nvSpPr>
+        <p:spPr>
+          <a:xfrm>
+            <a:off x="640080" y="3291840"/>
+            <a:ext cx="128016" cy="1600200"/>
+          </a:xfrm>
+          <a:prstGeom prst="roundRect">
+            <a:avLst/>
+          </a:prstGeom>
+          <a:solidFill>
+            <a:srgbClr val="8B4DDB"/>
+          </a:solidFill>
+          <a:ln/>
+        </p:spPr>
+      </p:sp>
+      <p:sp>
+        <p:nvSpPr>
+          <p:cNvPr id="14" name="Text 12"/>
+          <p:cNvSpPr txBox="1"/>
+          <p:nvPr/>
+        </p:nvSpPr>
+        <p:spPr>
+          <a:xfrm>
+            <a:off x="914400" y="3438144"/>
+            <a:ext cx="4937760" cy="457200"/>
+          </a:xfrm>
+          <a:prstGeom prst="rect">
+            <a:avLst/>
+          </a:prstGeom>
+          <a:noFill/>
+          <a:ln/>
+        </p:spPr>
+        <p:txBody>
+          <a:bodyPr wrap="square" lIns="0" tIns="0" rIns="0" bIns="0" rtlCol="0" anchor="ctr"/>
+          <a:lstStyle/>
+          <a:p>
+            <a:pPr indent="0" marL="0">
+              <a:buNone/>
+            </a:pPr>
+            <a:r>
+              <a:rPr lang="en-US" sz="1600" b="1" dirty="0">
+                <a:solidFill>
+                  <a:srgbClr val="8B4DDB"/>
+                </a:solidFill>
+                <a:latin typeface="Cambria" pitchFamily="34" charset="0"/>
+                <a:ea typeface="Cambria" pitchFamily="34" charset="-122"/>
+                <a:cs typeface="Cambria" pitchFamily="34" charset="-120"/>
+              </a:rPr>
+              <a:t>碎片化反事实</a:t>
+            </a:r>
+            <a:endParaRPr lang="en-US" sz="1600" dirty="0"/>
+          </a:p>
+        </p:txBody>
+      </p:sp>
+      <p:sp>
+        <p:nvSpPr>
+          <p:cNvPr id="15" name="Text 13"/>
+          <p:cNvSpPr txBox="1"/>
+          <p:nvPr/>
+        </p:nvSpPr>
+        <p:spPr>
+          <a:xfrm>
+            <a:off x="914400" y="3913632"/>
+            <a:ext cx="4937760" cy="914400"/>
+          </a:xfrm>
+          <a:prstGeom prst="rect">
+            <a:avLst/>
+          </a:prstGeom>
+          <a:noFill/>
+          <a:ln/>
+        </p:spPr>
+        <p:txBody>
+          <a:bodyPr wrap="square" lIns="0" tIns="0" rIns="0" bIns="0" rtlCol="0" anchor="t"/>
+          <a:lstStyle/>
+          <a:p>
+            <a:pPr algn="l" indent="0" marL="0">
+              <a:buNone/>
+            </a:pPr>
+            <a:r>
+              <a:rPr lang="en-US" sz="1250" dirty="0">
+                <a:solidFill>
+                  <a:srgbClr val="1A2633"/>
+                </a:solidFill>
+                <a:latin typeface="Calibri" pitchFamily="34" charset="0"/>
+                <a:ea typeface="Calibri" pitchFamily="34" charset="-122"/>
+                <a:cs typeface="Calibri" pitchFamily="34" charset="-120"/>
+              </a:rPr>
+              <a:t>单一大平台单次攻陷即控全城 8.4 MW/621 站；碎片化下仅 1.9 MW/107 站——爆炸半径约 1/4.5。</a:t>
+            </a:r>
+            <a:endParaRPr lang="en-US" sz="1250" dirty="0"/>
+          </a:p>
+        </p:txBody>
+      </p:sp>
+      <p:sp>
+        <p:nvSpPr>
+          <p:cNvPr id="16" name="Shape 14"/>
+          <p:cNvSpPr/>
+          <p:nvPr/>
+        </p:nvSpPr>
+        <p:spPr>
+          <a:xfrm>
+            <a:off x="6217920" y="3291840"/>
+            <a:ext cx="5349240" cy="1600200"/>
+          </a:xfrm>
+          <a:prstGeom prst="roundRect">
+            <a:avLst>
+              <a:gd name="adj" fmla="val 5143"/>
+            </a:avLst>
+          </a:prstGeom>
+          <a:solidFill>
+            <a:srgbClr val="F4F7FB"/>
+          </a:solidFill>
+          <a:ln w="12700">
+            <a:solidFill>
+              <a:srgbClr val="D7E0EA"/>
+            </a:solidFill>
+            <a:prstDash val="solid"/>
+          </a:ln>
+          <a:effectLst>
+            <a:outerShdw sx="100000" sy="100000" kx="0" ky="0" algn="bl" rotWithShape="0" blurRad="76200" dist="25400" dir="5400000">
+              <a:srgbClr val="B9C6D4">
+                <a:alpha val="30000"/>
+              </a:srgbClr>
+            </a:outerShdw>
+          </a:effectLst>
+        </p:spPr>
+      </p:sp>
+      <p:sp>
+        <p:nvSpPr>
+          <p:cNvPr id="17" name="Shape 15"/>
+          <p:cNvSpPr/>
+          <p:nvPr/>
+        </p:nvSpPr>
+        <p:spPr>
+          <a:xfrm>
+            <a:off x="6217920" y="3291840"/>
+            <a:ext cx="128016" cy="1600200"/>
+          </a:xfrm>
+          <a:prstGeom prst="roundRect">
+            <a:avLst/>
+          </a:prstGeom>
+          <a:solidFill>
+            <a:srgbClr val="F08A24"/>
+          </a:solidFill>
+          <a:ln/>
+        </p:spPr>
+      </p:sp>
+      <p:sp>
+        <p:nvSpPr>
+          <p:cNvPr id="18" name="Text 16"/>
+          <p:cNvSpPr txBox="1"/>
+          <p:nvPr/>
+        </p:nvSpPr>
+        <p:spPr>
+          <a:xfrm>
+            <a:off x="6492240" y="3438144"/>
+            <a:ext cx="4937760" cy="457200"/>
+          </a:xfrm>
+          <a:prstGeom prst="rect">
+            <a:avLst/>
+          </a:prstGeom>
+          <a:noFill/>
+          <a:ln/>
+        </p:spPr>
+        <p:txBody>
+          <a:bodyPr wrap="square" lIns="0" tIns="0" rIns="0" bIns="0" rtlCol="0" anchor="ctr"/>
+          <a:lstStyle/>
+          <a:p>
+            <a:pPr indent="0" marL="0">
+              <a:buNone/>
+            </a:pPr>
+            <a:r>
+              <a:rPr lang="en-US" sz="1600" b="1" dirty="0">
+                <a:solidFill>
+                  <a:srgbClr val="F08A24"/>
+                </a:solidFill>
+                <a:latin typeface="Cambria" pitchFamily="34" charset="0"/>
+                <a:ea typeface="Cambria" pitchFamily="34" charset="-122"/>
+                <a:cs typeface="Cambria" pitchFamily="34" charset="-120"/>
+              </a:rPr>
+              <a:t>诚实的检测盲区</a:t>
+            </a:r>
+            <a:endParaRPr lang="en-US" sz="1600" dirty="0"/>
+          </a:p>
+        </p:txBody>
+      </p:sp>
+      <p:sp>
+        <p:nvSpPr>
+          <p:cNvPr id="19" name="Text 17"/>
+          <p:cNvSpPr txBox="1"/>
+          <p:nvPr/>
+        </p:nvSpPr>
+        <p:spPr>
+          <a:xfrm>
+            <a:off x="6492240" y="3913632"/>
+            <a:ext cx="4937760" cy="914400"/>
+          </a:xfrm>
+          <a:prstGeom prst="rect">
+            <a:avLst/>
+          </a:prstGeom>
+          <a:noFill/>
+          <a:ln/>
+        </p:spPr>
+        <p:txBody>
+          <a:bodyPr wrap="square" lIns="0" tIns="0" rIns="0" bIns="0" rtlCol="0" anchor="t"/>
+          <a:lstStyle/>
+          <a:p>
+            <a:pPr algn="l" indent="0" marL="0">
+              <a:buNone/>
+            </a:pPr>
+            <a:r>
+              <a:rPr lang="en-US" sz="1250" dirty="0">
+                <a:solidFill>
+                  <a:srgbClr val="1A2633"/>
+                </a:solidFill>
+                <a:latin typeface="Calibri" pitchFamily="34" charset="0"/>
+                <a:ea typeface="Calibri" pitchFamily="34" charset="-122"/>
+                <a:cs typeface="Calibri" pitchFamily="34" charset="-120"/>
+              </a:rPr>
+              <a:t>极隐蔽攻击(≤1指令/分且浅度 f≤0.5)两信号同时失明；最优停止控制器嵌入真实引擎仍再降 64–84%。</a:t>
+            </a:r>
+            <a:endParaRPr lang="en-US" sz="1250" dirty="0"/>
+          </a:p>
+        </p:txBody>
+      </p:sp>
+      <p:sp>
+        <p:nvSpPr>
+          <p:cNvPr id="20" name="Shape 18"/>
+          <p:cNvSpPr/>
+          <p:nvPr/>
+        </p:nvSpPr>
+        <p:spPr>
+          <a:xfrm>
+            <a:off x="640080" y="5257800"/>
+            <a:ext cx="10927080" cy="914400"/>
+          </a:xfrm>
+          <a:prstGeom prst="roundRect">
+            <a:avLst>
+              <a:gd name="adj" fmla="val 9000"/>
+            </a:avLst>
+          </a:prstGeom>
+          <a:solidFill>
+            <a:srgbClr val="EAF1F8"/>
+          </a:solidFill>
+          <a:ln w="12700">
+            <a:solidFill>
+              <a:srgbClr val="BBD0E6"/>
+            </a:solidFill>
+            <a:prstDash val="solid"/>
+          </a:ln>
+        </p:spPr>
+      </p:sp>
+      <p:sp>
+        <p:nvSpPr>
+          <p:cNvPr id="21" name="Text 19"/>
+          <p:cNvSpPr txBox="1"/>
+          <p:nvPr/>
+        </p:nvSpPr>
+        <p:spPr>
+          <a:xfrm>
+            <a:off x="868680" y="5257800"/>
+            <a:ext cx="10515600" cy="914400"/>
+          </a:xfrm>
+          <a:prstGeom prst="rect">
+            <a:avLst/>
+          </a:prstGeom>
+          <a:noFill/>
+          <a:ln/>
+        </p:spPr>
+        <p:txBody>
+          <a:bodyPr wrap="square" lIns="0" tIns="0" rIns="0" bIns="0" rtlCol="0" anchor="ctr"/>
+          <a:lstStyle/>
+          <a:p>
+            <a:pPr algn="l" indent="0" marL="0">
+              <a:buNone/>
+            </a:pPr>
+            <a:r>
+              <a:rPr lang="en-US" sz="1350" b="1" dirty="0">
+                <a:solidFill>
+                  <a:srgbClr val="0F3D57"/>
+                </a:solidFill>
+                <a:latin typeface="Calibri" pitchFamily="34" charset="0"/>
+                <a:ea typeface="Calibri" pitchFamily="34" charset="-122"/>
+                <a:cs typeface="Calibri" pitchFamily="34" charset="-120"/>
+              </a:rPr>
+              <a:t>真实数据安全门：</a:t>
+            </a:r>
+            <a:pPr algn="l" indent="0" marL="0">
+              <a:buNone/>
+            </a:pPr>
+            <a:r>
+              <a:rPr lang="en-US" sz="1350" dirty="0">
+                <a:solidFill>
+                  <a:srgbClr val="1A2633"/>
+                </a:solidFill>
+                <a:latin typeface="Calibri" pitchFamily="34" charset="0"/>
+                <a:ea typeface="Calibri" pitchFamily="34" charset="-122"/>
+                <a:cs typeface="Calibri" pitchFamily="34" charset="-120"/>
+              </a:rPr>
+              <a:t>全年良性日误隔离率仅 0.29%；加“同步门”把大停电误隔离 36/39→0，而局部攻击仍 3/3 正确隔离。贝叶斯与 CUSUM 统计上不可区分、同处最优前沿。</a:t>
+            </a:r>
+            <a:endParaRPr lang="en-US" sz="1350" dirty="0"/>
+          </a:p>
+        </p:txBody>
+      </p:sp>
+    </p:spTree>
+  </p:cSld>
+  <p:clrMapOvr>
+    <a:masterClrMapping/>
+  </p:clrMapOvr>
+</p:sld>
+</file>
+
+<file path=ppt/slides/slide13.xml><?xml version="1.0" encoding="utf-8"?>
+<p:sld xmlns:a="http://schemas.openxmlformats.org/drawingml/2006/main" xmlns:r="http://schemas.openxmlformats.org/officeDocument/2006/relationships" xmlns:p="http://schemas.openxmlformats.org/presentationml/2006/main">
+  <p:cSld name="Slide 13">
+    <p:spTree>
+      <p:nvGrpSpPr>
+        <p:cNvPr id="1" name=""/>
+        <p:cNvGrpSpPr/>
+        <p:nvPr/>
+      </p:nvGrpSpPr>
+      <p:grpSpPr>
+        <a:xfrm>
+          <a:off x="0" y="0"/>
+          <a:ext cx="0" cy="0"/>
+          <a:chOff x="0" y="0"/>
+          <a:chExt cx="0" cy="0"/>
+        </a:xfrm>
+      </p:grpSpPr>
+      <p:sp>
+        <p:nvSpPr>
+          <p:cNvPr id="2" name="Text 0"/>
+          <p:cNvSpPr txBox="1"/>
+          <p:nvPr/>
+        </p:nvSpPr>
+        <p:spPr>
+          <a:xfrm>
+            <a:off x="566928" y="146304"/>
+            <a:ext cx="10972800" cy="274320"/>
+          </a:xfrm>
+          <a:prstGeom prst="rect">
+            <a:avLst/>
+          </a:prstGeom>
+          <a:noFill/>
+          <a:ln/>
+        </p:spPr>
+        <p:txBody>
+          <a:bodyPr wrap="square" lIns="0" tIns="0" rIns="0" bIns="0" rtlCol="0" anchor="ctr"/>
+          <a:lstStyle/>
+          <a:p>
+            <a:pPr indent="0" marL="0">
+              <a:buNone/>
+            </a:pPr>
+            <a:r>
+              <a:rPr lang="en-US" sz="1200" b="1" spc="200" kern="0" dirty="0">
+                <a:solidFill>
+                  <a:srgbClr val="1AA3C4"/>
+                </a:solidFill>
+                <a:latin typeface="Calibri" pitchFamily="34" charset="0"/>
+                <a:ea typeface="Calibri" pitchFamily="34" charset="-122"/>
+                <a:cs typeface="Calibri" pitchFamily="34" charset="-120"/>
+              </a:rPr>
+              <a:t>实验设计</a:t>
+            </a:r>
+            <a:endParaRPr lang="en-US" sz="1200" dirty="0"/>
+          </a:p>
+        </p:txBody>
+      </p:sp>
+      <p:sp>
+        <p:nvSpPr>
+          <p:cNvPr id="3" name="Text 1"/>
+          <p:cNvSpPr txBox="1"/>
+          <p:nvPr/>
+        </p:nvSpPr>
+        <p:spPr>
+          <a:xfrm>
+            <a:off x="548640" y="329184"/>
+            <a:ext cx="11064240" cy="731520"/>
+          </a:xfrm>
+          <a:prstGeom prst="rect">
+            <a:avLst/>
+          </a:prstGeom>
+          <a:noFill/>
+          <a:ln/>
+        </p:spPr>
+        <p:txBody>
+          <a:bodyPr wrap="square" lIns="0" tIns="0" rIns="0" bIns="0" rtlCol="0" anchor="ctr"/>
+          <a:lstStyle/>
+          <a:p>
+            <a:pPr algn="l" indent="0" marL="0">
+              <a:buNone/>
+            </a:pPr>
+            <a:r>
+              <a:rPr lang="en-US" sz="2800" b="1" dirty="0">
+                <a:solidFill>
+                  <a:srgbClr val="0F3D57"/>
+                </a:solidFill>
+                <a:latin typeface="Cambria" pitchFamily="34" charset="0"/>
+                <a:ea typeface="Cambria" pitchFamily="34" charset="-122"/>
+                <a:cs typeface="Cambria" pitchFamily="34" charset="-120"/>
+              </a:rPr>
               <a:t>场景矩阵与评价口径</a:t>
             </a:r>
             <a:endParaRPr lang="en-US" sz="2800" dirty="0"/>
@@ -3971,7 +4771,7 @@
       </p:sp>
       <p:graphicFrame>
         <p:nvGraphicFramePr>
-          <p:cNvPr id="13" name="Table 0"/>
+          <p:cNvPr id="14" name="Table 0"/>
           <p:cNvGraphicFramePr>
             <a:graphicFrameLocks noGrp="1"/>
           </p:cNvGraphicFramePr>
@@ -4955,9 +5755,9 @@
 </p:sld>
 </file>
 
-<file path=ppt/slides/slide13.xml><?xml version="1.0" encoding="utf-8"?>
+<file path=ppt/slides/slide14.xml><?xml version="1.0" encoding="utf-8"?>
 <p:sld xmlns:a="http://schemas.openxmlformats.org/drawingml/2006/main" xmlns:r="http://schemas.openxmlformats.org/officeDocument/2006/relationships" xmlns:p="http://schemas.openxmlformats.org/presentationml/2006/main">
-  <p:cSld name="Slide 13">
+  <p:cSld name="Slide 14">
     <p:spTree>
       <p:nvGrpSpPr>
         <p:cNvPr id="1" name=""/>
@@ -5530,9 +6330,9 @@
 </p:sld>
 </file>
 
-<file path=ppt/slides/slide14.xml><?xml version="1.0" encoding="utf-8"?>
+<file path=ppt/slides/slide15.xml><?xml version="1.0" encoding="utf-8"?>
 <p:sld xmlns:a="http://schemas.openxmlformats.org/drawingml/2006/main" xmlns:r="http://schemas.openxmlformats.org/officeDocument/2006/relationships" xmlns:p="http://schemas.openxmlformats.org/presentationml/2006/main">
-  <p:cSld name="Slide 14">
+  <p:cSld name="Slide 15">
     <p:spTree>
       <p:nvGrpSpPr>
         <p:cNvPr id="1" name=""/>
